--- a/assets/pawpal_demo.pptx
+++ b/assets/pawpal_demo.pptx
@@ -5,7 +5,7 @@
     <p:sldMasterId id="2147483870" r:id="rId1"/>
   </p:sldMasterIdLst>
   <p:notesMasterIdLst>
-    <p:notesMasterId r:id="rId10"/>
+    <p:notesMasterId r:id="rId18"/>
   </p:notesMasterIdLst>
   <p:sldIdLst>
     <p:sldId id="256" r:id="rId2"/>
@@ -16,6 +16,14 @@
     <p:sldId id="261" r:id="rId7"/>
     <p:sldId id="262" r:id="rId8"/>
     <p:sldId id="263" r:id="rId9"/>
+    <p:sldId id="264" r:id="rId10"/>
+    <p:sldId id="265" r:id="rId11"/>
+    <p:sldId id="266" r:id="rId12"/>
+    <p:sldId id="267" r:id="rId13"/>
+    <p:sldId id="268" r:id="rId14"/>
+    <p:sldId id="269" r:id="rId15"/>
+    <p:sldId id="270" r:id="rId16"/>
+    <p:sldId id="271" r:id="rId17"/>
   </p:sldIdLst>
   <p:sldSz cx="12192000" cy="6858000"/>
   <p:notesSz cx="6858000" cy="9144000"/>
@@ -6268,6 +6276,1151 @@
 </p:sld>
 </file>
 
+<file path=ppt/slides/slide10.xml><?xml version="1.0" encoding="utf-8"?>
+<p:sld xmlns:a="http://schemas.openxmlformats.org/drawingml/2006/main" xmlns:r="http://schemas.openxmlformats.org/officeDocument/2006/relationships" xmlns:p="http://schemas.openxmlformats.org/presentationml/2006/main">
+  <p:cSld>
+    <p:spTree>
+      <p:nvGrpSpPr>
+        <p:cNvPr id="1" name=""/>
+        <p:cNvGrpSpPr/>
+        <p:nvPr/>
+      </p:nvGrpSpPr>
+      <p:grpSpPr>
+        <a:xfrm>
+          <a:off x="0" y="0"/>
+          <a:ext cx="0" cy="0"/>
+          <a:chOff x="0" y="0"/>
+          <a:chExt cx="0" cy="0"/>
+        </a:xfrm>
+      </p:grpSpPr>
+      <p:sp>
+        <p:nvSpPr>
+          <p:cNvPr id="2" name="Title 1">
+            <a:extLst>
+              <a:ext uri="{FF2B5EF4-FFF2-40B4-BE49-F238E27FC236}">
+                <a16:creationId xmlns:a16="http://schemas.microsoft.com/office/drawing/2014/main" id="{90C2F740-A762-D968-C2D2-D6590FFD194E}"/>
+              </a:ext>
+            </a:extLst>
+          </p:cNvPr>
+          <p:cNvSpPr>
+            <a:spLocks noGrp="1"/>
+          </p:cNvSpPr>
+          <p:nvPr>
+            <p:ph type="title"/>
+          </p:nvPr>
+        </p:nvSpPr>
+        <p:spPr>
+          <a:xfrm>
+            <a:off x="2895600" y="764373"/>
+            <a:ext cx="8610600" cy="819498"/>
+          </a:xfrm>
+        </p:spPr>
+        <p:txBody>
+          <a:bodyPr/>
+          <a:lstStyle/>
+          <a:p>
+            <a:r>
+              <a:rPr lang="en-US" dirty="0">
+                <a:latin typeface="Times New Roman" panose="02020603050405020304" pitchFamily="18" charset="0"/>
+                <a:cs typeface="Times New Roman" panose="02020603050405020304" pitchFamily="18" charset="0"/>
+              </a:rPr>
+              <a:t>Demo (contd.)</a:t>
+            </a:r>
+            <a:endParaRPr lang="en-US" dirty="0"/>
+          </a:p>
+        </p:txBody>
+      </p:sp>
+      <p:sp>
+        <p:nvSpPr>
+          <p:cNvPr id="3" name="Content Placeholder 2">
+            <a:extLst>
+              <a:ext uri="{FF2B5EF4-FFF2-40B4-BE49-F238E27FC236}">
+                <a16:creationId xmlns:a16="http://schemas.microsoft.com/office/drawing/2014/main" id="{DF33CD33-F90F-F4CC-CE7B-841DE7A4AD68}"/>
+              </a:ext>
+            </a:extLst>
+          </p:cNvPr>
+          <p:cNvSpPr>
+            <a:spLocks noGrp="1"/>
+          </p:cNvSpPr>
+          <p:nvPr>
+            <p:ph idx="1"/>
+          </p:nvPr>
+        </p:nvSpPr>
+        <p:spPr>
+          <a:xfrm>
+            <a:off x="685800" y="1698172"/>
+            <a:ext cx="10820400" cy="4520514"/>
+          </a:xfrm>
+        </p:spPr>
+        <p:txBody>
+          <a:bodyPr/>
+          <a:lstStyle/>
+          <a:p>
+            <a:r>
+              <a:rPr lang="en-US" dirty="0">
+                <a:latin typeface="Times New Roman" panose="02020603050405020304" pitchFamily="18" charset="0"/>
+                <a:cs typeface="Times New Roman" panose="02020603050405020304" pitchFamily="18" charset="0"/>
+              </a:rPr>
+              <a:t>Pomeranian </a:t>
+            </a:r>
+          </a:p>
+        </p:txBody>
+      </p:sp>
+      <p:pic>
+        <p:nvPicPr>
+          <p:cNvPr id="5" name="Picture 4">
+            <a:extLst>
+              <a:ext uri="{FF2B5EF4-FFF2-40B4-BE49-F238E27FC236}">
+                <a16:creationId xmlns:a16="http://schemas.microsoft.com/office/drawing/2014/main" id="{43427C8B-BA96-CC81-D292-3BBE08A4C9DB}"/>
+              </a:ext>
+            </a:extLst>
+          </p:cNvPr>
+          <p:cNvPicPr>
+            <a:picLocks noChangeAspect="1"/>
+          </p:cNvPicPr>
+          <p:nvPr/>
+        </p:nvPicPr>
+        <p:blipFill>
+          <a:blip r:embed="rId2"/>
+          <a:stretch>
+            <a:fillRect/>
+          </a:stretch>
+        </p:blipFill>
+        <p:spPr>
+          <a:xfrm>
+            <a:off x="615042" y="2106856"/>
+            <a:ext cx="4680858" cy="3902058"/>
+          </a:xfrm>
+          <a:prstGeom prst="rect">
+            <a:avLst/>
+          </a:prstGeom>
+        </p:spPr>
+      </p:pic>
+      <p:pic>
+        <p:nvPicPr>
+          <p:cNvPr id="7" name="Picture 6">
+            <a:extLst>
+              <a:ext uri="{FF2B5EF4-FFF2-40B4-BE49-F238E27FC236}">
+                <a16:creationId xmlns:a16="http://schemas.microsoft.com/office/drawing/2014/main" id="{DDAEAA65-2621-39F7-3638-54E71122D99A}"/>
+              </a:ext>
+            </a:extLst>
+          </p:cNvPr>
+          <p:cNvPicPr>
+            <a:picLocks noChangeAspect="1"/>
+          </p:cNvPicPr>
+          <p:nvPr/>
+        </p:nvPicPr>
+        <p:blipFill>
+          <a:blip r:embed="rId3"/>
+          <a:stretch>
+            <a:fillRect/>
+          </a:stretch>
+        </p:blipFill>
+        <p:spPr>
+          <a:xfrm>
+            <a:off x="4478525" y="2318657"/>
+            <a:ext cx="3997720" cy="3804558"/>
+          </a:xfrm>
+          <a:prstGeom prst="rect">
+            <a:avLst/>
+          </a:prstGeom>
+        </p:spPr>
+      </p:pic>
+      <p:pic>
+        <p:nvPicPr>
+          <p:cNvPr id="9" name="Picture 8">
+            <a:extLst>
+              <a:ext uri="{FF2B5EF4-FFF2-40B4-BE49-F238E27FC236}">
+                <a16:creationId xmlns:a16="http://schemas.microsoft.com/office/drawing/2014/main" id="{27CCF387-F3FB-6BDC-A3FD-A174C5AA2693}"/>
+              </a:ext>
+            </a:extLst>
+          </p:cNvPr>
+          <p:cNvPicPr>
+            <a:picLocks noChangeAspect="1"/>
+          </p:cNvPicPr>
+          <p:nvPr/>
+        </p:nvPicPr>
+        <p:blipFill>
+          <a:blip r:embed="rId4"/>
+          <a:stretch>
+            <a:fillRect/>
+          </a:stretch>
+        </p:blipFill>
+        <p:spPr>
+          <a:xfrm>
+            <a:off x="8183148" y="2517670"/>
+            <a:ext cx="3490456" cy="3575957"/>
+          </a:xfrm>
+          <a:prstGeom prst="rect">
+            <a:avLst/>
+          </a:prstGeom>
+        </p:spPr>
+      </p:pic>
+    </p:spTree>
+    <p:extLst>
+      <p:ext uri="{BB962C8B-B14F-4D97-AF65-F5344CB8AC3E}">
+        <p14:creationId xmlns:p14="http://schemas.microsoft.com/office/powerpoint/2010/main" val="4149190431"/>
+      </p:ext>
+    </p:extLst>
+  </p:cSld>
+  <p:clrMapOvr>
+    <a:masterClrMapping/>
+  </p:clrMapOvr>
+</p:sld>
+</file>
+
+<file path=ppt/slides/slide11.xml><?xml version="1.0" encoding="utf-8"?>
+<p:sld xmlns:a="http://schemas.openxmlformats.org/drawingml/2006/main" xmlns:r="http://schemas.openxmlformats.org/officeDocument/2006/relationships" xmlns:p="http://schemas.openxmlformats.org/presentationml/2006/main">
+  <p:cSld>
+    <p:spTree>
+      <p:nvGrpSpPr>
+        <p:cNvPr id="1" name=""/>
+        <p:cNvGrpSpPr/>
+        <p:nvPr/>
+      </p:nvGrpSpPr>
+      <p:grpSpPr>
+        <a:xfrm>
+          <a:off x="0" y="0"/>
+          <a:ext cx="0" cy="0"/>
+          <a:chOff x="0" y="0"/>
+          <a:chExt cx="0" cy="0"/>
+        </a:xfrm>
+      </p:grpSpPr>
+      <p:sp>
+        <p:nvSpPr>
+          <p:cNvPr id="2" name="Title 1">
+            <a:extLst>
+              <a:ext uri="{FF2B5EF4-FFF2-40B4-BE49-F238E27FC236}">
+                <a16:creationId xmlns:a16="http://schemas.microsoft.com/office/drawing/2014/main" id="{635519B9-D346-3C46-8717-10B3CD7C0257}"/>
+              </a:ext>
+            </a:extLst>
+          </p:cNvPr>
+          <p:cNvSpPr>
+            <a:spLocks noGrp="1"/>
+          </p:cNvSpPr>
+          <p:nvPr>
+            <p:ph type="title"/>
+          </p:nvPr>
+        </p:nvSpPr>
+        <p:spPr>
+          <a:xfrm>
+            <a:off x="2895600" y="764373"/>
+            <a:ext cx="8610600" cy="950127"/>
+          </a:xfrm>
+        </p:spPr>
+        <p:txBody>
+          <a:bodyPr/>
+          <a:lstStyle/>
+          <a:p>
+            <a:r>
+              <a:rPr lang="en-US" dirty="0">
+                <a:latin typeface="Times New Roman" panose="02020603050405020304" pitchFamily="18" charset="0"/>
+                <a:cs typeface="Times New Roman" panose="02020603050405020304" pitchFamily="18" charset="0"/>
+              </a:rPr>
+              <a:t>Demo (contd.)</a:t>
+            </a:r>
+            <a:endParaRPr lang="en-US" dirty="0"/>
+          </a:p>
+        </p:txBody>
+      </p:sp>
+      <p:sp>
+        <p:nvSpPr>
+          <p:cNvPr id="3" name="Content Placeholder 2">
+            <a:extLst>
+              <a:ext uri="{FF2B5EF4-FFF2-40B4-BE49-F238E27FC236}">
+                <a16:creationId xmlns:a16="http://schemas.microsoft.com/office/drawing/2014/main" id="{723B2CD0-4814-C26D-B89C-78A76B740664}"/>
+              </a:ext>
+            </a:extLst>
+          </p:cNvPr>
+          <p:cNvSpPr>
+            <a:spLocks noGrp="1"/>
+          </p:cNvSpPr>
+          <p:nvPr>
+            <p:ph idx="1"/>
+          </p:nvPr>
+        </p:nvSpPr>
+        <p:spPr>
+          <a:xfrm>
+            <a:off x="685800" y="1714500"/>
+            <a:ext cx="10820400" cy="4849586"/>
+          </a:xfrm>
+        </p:spPr>
+        <p:txBody>
+          <a:bodyPr/>
+          <a:lstStyle/>
+          <a:p>
+            <a:r>
+              <a:rPr lang="en-US" dirty="0">
+                <a:latin typeface="Times New Roman" panose="02020603050405020304" pitchFamily="18" charset="0"/>
+                <a:cs typeface="Times New Roman" panose="02020603050405020304" pitchFamily="18" charset="0"/>
+              </a:rPr>
+              <a:t>Pomeranian </a:t>
+            </a:r>
+          </a:p>
+        </p:txBody>
+      </p:sp>
+      <p:pic>
+        <p:nvPicPr>
+          <p:cNvPr id="5" name="Picture 4">
+            <a:extLst>
+              <a:ext uri="{FF2B5EF4-FFF2-40B4-BE49-F238E27FC236}">
+                <a16:creationId xmlns:a16="http://schemas.microsoft.com/office/drawing/2014/main" id="{FA568789-3B29-4FAD-EA08-69163D1B23AA}"/>
+              </a:ext>
+            </a:extLst>
+          </p:cNvPr>
+          <p:cNvPicPr>
+            <a:picLocks noChangeAspect="1"/>
+          </p:cNvPicPr>
+          <p:nvPr/>
+        </p:nvPicPr>
+        <p:blipFill>
+          <a:blip r:embed="rId2"/>
+          <a:stretch>
+            <a:fillRect/>
+          </a:stretch>
+        </p:blipFill>
+        <p:spPr>
+          <a:xfrm>
+            <a:off x="566931" y="2264229"/>
+            <a:ext cx="4186009" cy="3668486"/>
+          </a:xfrm>
+          <a:prstGeom prst="rect">
+            <a:avLst/>
+          </a:prstGeom>
+        </p:spPr>
+      </p:pic>
+      <p:pic>
+        <p:nvPicPr>
+          <p:cNvPr id="7" name="Picture 6">
+            <a:extLst>
+              <a:ext uri="{FF2B5EF4-FFF2-40B4-BE49-F238E27FC236}">
+                <a16:creationId xmlns:a16="http://schemas.microsoft.com/office/drawing/2014/main" id="{D4E39429-F55D-FF44-8AEE-EB76D5844075}"/>
+              </a:ext>
+            </a:extLst>
+          </p:cNvPr>
+          <p:cNvPicPr>
+            <a:picLocks noChangeAspect="1"/>
+          </p:cNvPicPr>
+          <p:nvPr/>
+        </p:nvPicPr>
+        <p:blipFill>
+          <a:blip r:embed="rId3"/>
+          <a:stretch>
+            <a:fillRect/>
+          </a:stretch>
+        </p:blipFill>
+        <p:spPr>
+          <a:xfrm>
+            <a:off x="4524343" y="2786745"/>
+            <a:ext cx="4185170" cy="3385456"/>
+          </a:xfrm>
+          <a:prstGeom prst="rect">
+            <a:avLst/>
+          </a:prstGeom>
+        </p:spPr>
+      </p:pic>
+      <p:pic>
+        <p:nvPicPr>
+          <p:cNvPr id="9" name="Picture 8">
+            <a:extLst>
+              <a:ext uri="{FF2B5EF4-FFF2-40B4-BE49-F238E27FC236}">
+                <a16:creationId xmlns:a16="http://schemas.microsoft.com/office/drawing/2014/main" id="{5330F4D4-C2ED-16A7-3DFB-88994127070D}"/>
+              </a:ext>
+            </a:extLst>
+          </p:cNvPr>
+          <p:cNvPicPr>
+            <a:picLocks noChangeAspect="1"/>
+          </p:cNvPicPr>
+          <p:nvPr/>
+        </p:nvPicPr>
+        <p:blipFill>
+          <a:blip r:embed="rId4"/>
+          <a:stretch>
+            <a:fillRect/>
+          </a:stretch>
+        </p:blipFill>
+        <p:spPr>
+          <a:xfrm>
+            <a:off x="8479894" y="2739990"/>
+            <a:ext cx="3543439" cy="1749529"/>
+          </a:xfrm>
+          <a:prstGeom prst="rect">
+            <a:avLst/>
+          </a:prstGeom>
+        </p:spPr>
+      </p:pic>
+    </p:spTree>
+    <p:extLst>
+      <p:ext uri="{BB962C8B-B14F-4D97-AF65-F5344CB8AC3E}">
+        <p14:creationId xmlns:p14="http://schemas.microsoft.com/office/powerpoint/2010/main" val="2504208609"/>
+      </p:ext>
+    </p:extLst>
+  </p:cSld>
+  <p:clrMapOvr>
+    <a:masterClrMapping/>
+  </p:clrMapOvr>
+</p:sld>
+</file>
+
+<file path=ppt/slides/slide12.xml><?xml version="1.0" encoding="utf-8"?>
+<p:sld xmlns:a="http://schemas.openxmlformats.org/drawingml/2006/main" xmlns:r="http://schemas.openxmlformats.org/officeDocument/2006/relationships" xmlns:p="http://schemas.openxmlformats.org/presentationml/2006/main">
+  <p:cSld>
+    <p:spTree>
+      <p:nvGrpSpPr>
+        <p:cNvPr id="1" name=""/>
+        <p:cNvGrpSpPr/>
+        <p:nvPr/>
+      </p:nvGrpSpPr>
+      <p:grpSpPr>
+        <a:xfrm>
+          <a:off x="0" y="0"/>
+          <a:ext cx="0" cy="0"/>
+          <a:chOff x="0" y="0"/>
+          <a:chExt cx="0" cy="0"/>
+        </a:xfrm>
+      </p:grpSpPr>
+      <p:sp>
+        <p:nvSpPr>
+          <p:cNvPr id="2" name="Title 1">
+            <a:extLst>
+              <a:ext uri="{FF2B5EF4-FFF2-40B4-BE49-F238E27FC236}">
+                <a16:creationId xmlns:a16="http://schemas.microsoft.com/office/drawing/2014/main" id="{1295FB13-0AAD-7A64-EEE6-7D3E7AD597A2}"/>
+              </a:ext>
+            </a:extLst>
+          </p:cNvPr>
+          <p:cNvSpPr>
+            <a:spLocks noGrp="1"/>
+          </p:cNvSpPr>
+          <p:nvPr>
+            <p:ph type="title"/>
+          </p:nvPr>
+        </p:nvSpPr>
+        <p:spPr>
+          <a:xfrm>
+            <a:off x="2895600" y="764373"/>
+            <a:ext cx="8610600" cy="797727"/>
+          </a:xfrm>
+        </p:spPr>
+        <p:txBody>
+          <a:bodyPr/>
+          <a:lstStyle/>
+          <a:p>
+            <a:r>
+              <a:rPr lang="en-US" dirty="0">
+                <a:latin typeface="Times New Roman" panose="02020603050405020304" pitchFamily="18" charset="0"/>
+                <a:cs typeface="Times New Roman" panose="02020603050405020304" pitchFamily="18" charset="0"/>
+              </a:rPr>
+              <a:t>Demo (contd.)</a:t>
+            </a:r>
+          </a:p>
+        </p:txBody>
+      </p:sp>
+      <p:sp>
+        <p:nvSpPr>
+          <p:cNvPr id="3" name="Content Placeholder 2">
+            <a:extLst>
+              <a:ext uri="{FF2B5EF4-FFF2-40B4-BE49-F238E27FC236}">
+                <a16:creationId xmlns:a16="http://schemas.microsoft.com/office/drawing/2014/main" id="{762A112B-E209-9B47-ABBF-D3F2D502C508}"/>
+              </a:ext>
+            </a:extLst>
+          </p:cNvPr>
+          <p:cNvSpPr>
+            <a:spLocks noGrp="1"/>
+          </p:cNvSpPr>
+          <p:nvPr>
+            <p:ph idx="1"/>
+          </p:nvPr>
+        </p:nvSpPr>
+        <p:spPr>
+          <a:xfrm>
+            <a:off x="685800" y="1562100"/>
+            <a:ext cx="10820400" cy="4656585"/>
+          </a:xfrm>
+        </p:spPr>
+        <p:txBody>
+          <a:bodyPr/>
+          <a:lstStyle/>
+          <a:p>
+            <a:r>
+              <a:rPr lang="en-US" dirty="0">
+                <a:latin typeface="Times New Roman" panose="02020603050405020304" pitchFamily="18" charset="0"/>
+                <a:cs typeface="Times New Roman" panose="02020603050405020304" pitchFamily="18" charset="0"/>
+              </a:rPr>
+              <a:t>Persian Cat</a:t>
+            </a:r>
+          </a:p>
+        </p:txBody>
+      </p:sp>
+      <p:pic>
+        <p:nvPicPr>
+          <p:cNvPr id="5" name="Picture 4">
+            <a:extLst>
+              <a:ext uri="{FF2B5EF4-FFF2-40B4-BE49-F238E27FC236}">
+                <a16:creationId xmlns:a16="http://schemas.microsoft.com/office/drawing/2014/main" id="{9F02F66E-2749-D66E-6AA3-F10543CC794C}"/>
+              </a:ext>
+            </a:extLst>
+          </p:cNvPr>
+          <p:cNvPicPr>
+            <a:picLocks noChangeAspect="1"/>
+          </p:cNvPicPr>
+          <p:nvPr/>
+        </p:nvPicPr>
+        <p:blipFill>
+          <a:blip r:embed="rId2"/>
+          <a:stretch>
+            <a:fillRect/>
+          </a:stretch>
+        </p:blipFill>
+        <p:spPr>
+          <a:xfrm>
+            <a:off x="462643" y="2121225"/>
+            <a:ext cx="4794949" cy="4156003"/>
+          </a:xfrm>
+          <a:prstGeom prst="rect">
+            <a:avLst/>
+          </a:prstGeom>
+        </p:spPr>
+      </p:pic>
+      <p:pic>
+        <p:nvPicPr>
+          <p:cNvPr id="7" name="Picture 6">
+            <a:extLst>
+              <a:ext uri="{FF2B5EF4-FFF2-40B4-BE49-F238E27FC236}">
+                <a16:creationId xmlns:a16="http://schemas.microsoft.com/office/drawing/2014/main" id="{31B8CB59-036D-0E99-7C85-EB4A008B823B}"/>
+              </a:ext>
+            </a:extLst>
+          </p:cNvPr>
+          <p:cNvPicPr>
+            <a:picLocks noChangeAspect="1"/>
+          </p:cNvPicPr>
+          <p:nvPr/>
+        </p:nvPicPr>
+        <p:blipFill>
+          <a:blip r:embed="rId3"/>
+          <a:stretch>
+            <a:fillRect/>
+          </a:stretch>
+        </p:blipFill>
+        <p:spPr>
+          <a:xfrm>
+            <a:off x="5802370" y="1888672"/>
+            <a:ext cx="4794949" cy="4272642"/>
+          </a:xfrm>
+          <a:prstGeom prst="rect">
+            <a:avLst/>
+          </a:prstGeom>
+        </p:spPr>
+      </p:pic>
+    </p:spTree>
+    <p:extLst>
+      <p:ext uri="{BB962C8B-B14F-4D97-AF65-F5344CB8AC3E}">
+        <p14:creationId xmlns:p14="http://schemas.microsoft.com/office/powerpoint/2010/main" val="1372028636"/>
+      </p:ext>
+    </p:extLst>
+  </p:cSld>
+  <p:clrMapOvr>
+    <a:masterClrMapping/>
+  </p:clrMapOvr>
+</p:sld>
+</file>
+
+<file path=ppt/slides/slide13.xml><?xml version="1.0" encoding="utf-8"?>
+<p:sld xmlns:a="http://schemas.openxmlformats.org/drawingml/2006/main" xmlns:r="http://schemas.openxmlformats.org/officeDocument/2006/relationships" xmlns:p="http://schemas.openxmlformats.org/presentationml/2006/main">
+  <p:cSld>
+    <p:spTree>
+      <p:nvGrpSpPr>
+        <p:cNvPr id="1" name=""/>
+        <p:cNvGrpSpPr/>
+        <p:nvPr/>
+      </p:nvGrpSpPr>
+      <p:grpSpPr>
+        <a:xfrm>
+          <a:off x="0" y="0"/>
+          <a:ext cx="0" cy="0"/>
+          <a:chOff x="0" y="0"/>
+          <a:chExt cx="0" cy="0"/>
+        </a:xfrm>
+      </p:grpSpPr>
+      <p:sp>
+        <p:nvSpPr>
+          <p:cNvPr id="2" name="Title 1">
+            <a:extLst>
+              <a:ext uri="{FF2B5EF4-FFF2-40B4-BE49-F238E27FC236}">
+                <a16:creationId xmlns:a16="http://schemas.microsoft.com/office/drawing/2014/main" id="{262877A5-FBF9-747F-3B56-459466931641}"/>
+              </a:ext>
+            </a:extLst>
+          </p:cNvPr>
+          <p:cNvSpPr>
+            <a:spLocks noGrp="1"/>
+          </p:cNvSpPr>
+          <p:nvPr>
+            <p:ph type="title"/>
+          </p:nvPr>
+        </p:nvSpPr>
+        <p:spPr>
+          <a:xfrm>
+            <a:off x="2895600" y="764373"/>
+            <a:ext cx="8610600" cy="950127"/>
+          </a:xfrm>
+        </p:spPr>
+        <p:txBody>
+          <a:bodyPr/>
+          <a:lstStyle/>
+          <a:p>
+            <a:r>
+              <a:rPr lang="en-US" dirty="0">
+                <a:latin typeface="Times New Roman" panose="02020603050405020304" pitchFamily="18" charset="0"/>
+                <a:cs typeface="Times New Roman" panose="02020603050405020304" pitchFamily="18" charset="0"/>
+              </a:rPr>
+              <a:t>Demo (contd.)</a:t>
+            </a:r>
+          </a:p>
+        </p:txBody>
+      </p:sp>
+      <p:sp>
+        <p:nvSpPr>
+          <p:cNvPr id="3" name="Content Placeholder 2">
+            <a:extLst>
+              <a:ext uri="{FF2B5EF4-FFF2-40B4-BE49-F238E27FC236}">
+                <a16:creationId xmlns:a16="http://schemas.microsoft.com/office/drawing/2014/main" id="{43B42240-A643-EA28-E7AC-D4AEBF50DC58}"/>
+              </a:ext>
+            </a:extLst>
+          </p:cNvPr>
+          <p:cNvSpPr>
+            <a:spLocks noGrp="1"/>
+          </p:cNvSpPr>
+          <p:nvPr>
+            <p:ph idx="1"/>
+          </p:nvPr>
+        </p:nvSpPr>
+        <p:spPr>
+          <a:xfrm>
+            <a:off x="685800" y="1714500"/>
+            <a:ext cx="10820400" cy="4504185"/>
+          </a:xfrm>
+        </p:spPr>
+        <p:txBody>
+          <a:bodyPr/>
+          <a:lstStyle/>
+          <a:p>
+            <a:r>
+              <a:rPr lang="en-US" dirty="0">
+                <a:latin typeface="Times New Roman" panose="02020603050405020304" pitchFamily="18" charset="0"/>
+                <a:cs typeface="Times New Roman" panose="02020603050405020304" pitchFamily="18" charset="0"/>
+              </a:rPr>
+              <a:t>Persian Cat</a:t>
+            </a:r>
+          </a:p>
+        </p:txBody>
+      </p:sp>
+      <p:pic>
+        <p:nvPicPr>
+          <p:cNvPr id="5" name="Picture 4">
+            <a:extLst>
+              <a:ext uri="{FF2B5EF4-FFF2-40B4-BE49-F238E27FC236}">
+                <a16:creationId xmlns:a16="http://schemas.microsoft.com/office/drawing/2014/main" id="{525F8469-C6D1-AC2A-19D5-7FD623158F4F}"/>
+              </a:ext>
+            </a:extLst>
+          </p:cNvPr>
+          <p:cNvPicPr>
+            <a:picLocks noChangeAspect="1"/>
+          </p:cNvPicPr>
+          <p:nvPr/>
+        </p:nvPicPr>
+        <p:blipFill>
+          <a:blip r:embed="rId2"/>
+          <a:stretch>
+            <a:fillRect/>
+          </a:stretch>
+        </p:blipFill>
+        <p:spPr>
+          <a:xfrm>
+            <a:off x="288473" y="2010637"/>
+            <a:ext cx="4637312" cy="4390162"/>
+          </a:xfrm>
+          <a:prstGeom prst="rect">
+            <a:avLst/>
+          </a:prstGeom>
+        </p:spPr>
+      </p:pic>
+      <p:pic>
+        <p:nvPicPr>
+          <p:cNvPr id="7" name="Picture 6">
+            <a:extLst>
+              <a:ext uri="{FF2B5EF4-FFF2-40B4-BE49-F238E27FC236}">
+                <a16:creationId xmlns:a16="http://schemas.microsoft.com/office/drawing/2014/main" id="{00B2946F-88AF-36CB-B272-668CD4C97618}"/>
+              </a:ext>
+            </a:extLst>
+          </p:cNvPr>
+          <p:cNvPicPr>
+            <a:picLocks noChangeAspect="1"/>
+          </p:cNvPicPr>
+          <p:nvPr/>
+        </p:nvPicPr>
+        <p:blipFill>
+          <a:blip r:embed="rId3"/>
+          <a:stretch>
+            <a:fillRect/>
+          </a:stretch>
+        </p:blipFill>
+        <p:spPr>
+          <a:xfrm>
+            <a:off x="5528487" y="1892863"/>
+            <a:ext cx="5098899" cy="4504184"/>
+          </a:xfrm>
+          <a:prstGeom prst="rect">
+            <a:avLst/>
+          </a:prstGeom>
+        </p:spPr>
+      </p:pic>
+    </p:spTree>
+    <p:extLst>
+      <p:ext uri="{BB962C8B-B14F-4D97-AF65-F5344CB8AC3E}">
+        <p14:creationId xmlns:p14="http://schemas.microsoft.com/office/powerpoint/2010/main" val="631773335"/>
+      </p:ext>
+    </p:extLst>
+  </p:cSld>
+  <p:clrMapOvr>
+    <a:masterClrMapping/>
+  </p:clrMapOvr>
+</p:sld>
+</file>
+
+<file path=ppt/slides/slide14.xml><?xml version="1.0" encoding="utf-8"?>
+<p:sld xmlns:a="http://schemas.openxmlformats.org/drawingml/2006/main" xmlns:r="http://schemas.openxmlformats.org/officeDocument/2006/relationships" xmlns:p="http://schemas.openxmlformats.org/presentationml/2006/main">
+  <p:cSld>
+    <p:spTree>
+      <p:nvGrpSpPr>
+        <p:cNvPr id="1" name=""/>
+        <p:cNvGrpSpPr/>
+        <p:nvPr/>
+      </p:nvGrpSpPr>
+      <p:grpSpPr>
+        <a:xfrm>
+          <a:off x="0" y="0"/>
+          <a:ext cx="0" cy="0"/>
+          <a:chOff x="0" y="0"/>
+          <a:chExt cx="0" cy="0"/>
+        </a:xfrm>
+      </p:grpSpPr>
+      <p:sp>
+        <p:nvSpPr>
+          <p:cNvPr id="2" name="Title 1">
+            <a:extLst>
+              <a:ext uri="{FF2B5EF4-FFF2-40B4-BE49-F238E27FC236}">
+                <a16:creationId xmlns:a16="http://schemas.microsoft.com/office/drawing/2014/main" id="{51EA4E36-8E54-80F0-B7E8-588143C9CB02}"/>
+              </a:ext>
+            </a:extLst>
+          </p:cNvPr>
+          <p:cNvSpPr>
+            <a:spLocks noGrp="1"/>
+          </p:cNvSpPr>
+          <p:nvPr>
+            <p:ph type="title"/>
+          </p:nvPr>
+        </p:nvSpPr>
+        <p:spPr>
+          <a:xfrm>
+            <a:off x="2895600" y="764373"/>
+            <a:ext cx="8610600" cy="830384"/>
+          </a:xfrm>
+        </p:spPr>
+        <p:txBody>
+          <a:bodyPr/>
+          <a:lstStyle/>
+          <a:p>
+            <a:r>
+              <a:rPr lang="en-US" dirty="0">
+                <a:latin typeface="Times New Roman" panose="02020603050405020304" pitchFamily="18" charset="0"/>
+                <a:cs typeface="Times New Roman" panose="02020603050405020304" pitchFamily="18" charset="0"/>
+              </a:rPr>
+              <a:t>Demo (contd.)</a:t>
+            </a:r>
+          </a:p>
+        </p:txBody>
+      </p:sp>
+      <p:sp>
+        <p:nvSpPr>
+          <p:cNvPr id="3" name="Content Placeholder 2">
+            <a:extLst>
+              <a:ext uri="{FF2B5EF4-FFF2-40B4-BE49-F238E27FC236}">
+                <a16:creationId xmlns:a16="http://schemas.microsoft.com/office/drawing/2014/main" id="{429A0648-D4C0-F33C-E1A6-DA144E250BE8}"/>
+              </a:ext>
+            </a:extLst>
+          </p:cNvPr>
+          <p:cNvSpPr>
+            <a:spLocks noGrp="1"/>
+          </p:cNvSpPr>
+          <p:nvPr>
+            <p:ph idx="1"/>
+          </p:nvPr>
+        </p:nvSpPr>
+        <p:spPr>
+          <a:xfrm>
+            <a:off x="685800" y="1594758"/>
+            <a:ext cx="10820400" cy="4623928"/>
+          </a:xfrm>
+        </p:spPr>
+        <p:txBody>
+          <a:bodyPr/>
+          <a:lstStyle/>
+          <a:p>
+            <a:r>
+              <a:rPr lang="en-US" dirty="0">
+                <a:latin typeface="Times New Roman" panose="02020603050405020304" pitchFamily="18" charset="0"/>
+                <a:cs typeface="Times New Roman" panose="02020603050405020304" pitchFamily="18" charset="0"/>
+              </a:rPr>
+              <a:t>Persian Cat</a:t>
+            </a:r>
+          </a:p>
+          <a:p>
+            <a:endParaRPr lang="en-US" dirty="0">
+              <a:latin typeface="Times New Roman" panose="02020603050405020304" pitchFamily="18" charset="0"/>
+              <a:cs typeface="Times New Roman" panose="02020603050405020304" pitchFamily="18" charset="0"/>
+            </a:endParaRPr>
+          </a:p>
+        </p:txBody>
+      </p:sp>
+      <p:pic>
+        <p:nvPicPr>
+          <p:cNvPr id="5" name="Picture 4">
+            <a:extLst>
+              <a:ext uri="{FF2B5EF4-FFF2-40B4-BE49-F238E27FC236}">
+                <a16:creationId xmlns:a16="http://schemas.microsoft.com/office/drawing/2014/main" id="{CA4AEFD3-8058-6E5C-F7CF-DAD93E826EC9}"/>
+              </a:ext>
+            </a:extLst>
+          </p:cNvPr>
+          <p:cNvPicPr>
+            <a:picLocks noChangeAspect="1"/>
+          </p:cNvPicPr>
+          <p:nvPr/>
+        </p:nvPicPr>
+        <p:blipFill>
+          <a:blip r:embed="rId2"/>
+          <a:stretch>
+            <a:fillRect/>
+          </a:stretch>
+        </p:blipFill>
+        <p:spPr>
+          <a:xfrm>
+            <a:off x="86090" y="2149929"/>
+            <a:ext cx="6009910" cy="4708071"/>
+          </a:xfrm>
+          <a:prstGeom prst="rect">
+            <a:avLst/>
+          </a:prstGeom>
+        </p:spPr>
+      </p:pic>
+      <p:pic>
+        <p:nvPicPr>
+          <p:cNvPr id="7" name="Picture 6">
+            <a:extLst>
+              <a:ext uri="{FF2B5EF4-FFF2-40B4-BE49-F238E27FC236}">
+                <a16:creationId xmlns:a16="http://schemas.microsoft.com/office/drawing/2014/main" id="{9CA97200-AE81-34B5-336C-2C4074B89FB1}"/>
+              </a:ext>
+            </a:extLst>
+          </p:cNvPr>
+          <p:cNvPicPr>
+            <a:picLocks noChangeAspect="1"/>
+          </p:cNvPicPr>
+          <p:nvPr/>
+        </p:nvPicPr>
+        <p:blipFill>
+          <a:blip r:embed="rId3"/>
+          <a:stretch>
+            <a:fillRect/>
+          </a:stretch>
+        </p:blipFill>
+        <p:spPr>
+          <a:xfrm>
+            <a:off x="5945151" y="2013479"/>
+            <a:ext cx="5430419" cy="2417007"/>
+          </a:xfrm>
+          <a:prstGeom prst="rect">
+            <a:avLst/>
+          </a:prstGeom>
+        </p:spPr>
+      </p:pic>
+    </p:spTree>
+    <p:extLst>
+      <p:ext uri="{BB962C8B-B14F-4D97-AF65-F5344CB8AC3E}">
+        <p14:creationId xmlns:p14="http://schemas.microsoft.com/office/powerpoint/2010/main" val="2097445539"/>
+      </p:ext>
+    </p:extLst>
+  </p:cSld>
+  <p:clrMapOvr>
+    <a:masterClrMapping/>
+  </p:clrMapOvr>
+</p:sld>
+</file>
+
+<file path=ppt/slides/slide15.xml><?xml version="1.0" encoding="utf-8"?>
+<p:sld xmlns:a="http://schemas.openxmlformats.org/drawingml/2006/main" xmlns:r="http://schemas.openxmlformats.org/officeDocument/2006/relationships" xmlns:p="http://schemas.openxmlformats.org/presentationml/2006/main">
+  <p:cSld>
+    <p:spTree>
+      <p:nvGrpSpPr>
+        <p:cNvPr id="1" name=""/>
+        <p:cNvGrpSpPr/>
+        <p:nvPr/>
+      </p:nvGrpSpPr>
+      <p:grpSpPr>
+        <a:xfrm>
+          <a:off x="0" y="0"/>
+          <a:ext cx="0" cy="0"/>
+          <a:chOff x="0" y="0"/>
+          <a:chExt cx="0" cy="0"/>
+        </a:xfrm>
+      </p:grpSpPr>
+      <p:sp>
+        <p:nvSpPr>
+          <p:cNvPr id="2" name="Title 1">
+            <a:extLst>
+              <a:ext uri="{FF2B5EF4-FFF2-40B4-BE49-F238E27FC236}">
+                <a16:creationId xmlns:a16="http://schemas.microsoft.com/office/drawing/2014/main" id="{C96315AB-8919-4B33-4283-E437BAB1CA28}"/>
+              </a:ext>
+            </a:extLst>
+          </p:cNvPr>
+          <p:cNvSpPr>
+            <a:spLocks noGrp="1"/>
+          </p:cNvSpPr>
+          <p:nvPr>
+            <p:ph type="title"/>
+          </p:nvPr>
+        </p:nvSpPr>
+        <p:spPr>
+          <a:xfrm>
+            <a:off x="2895600" y="764373"/>
+            <a:ext cx="8610600" cy="841270"/>
+          </a:xfrm>
+        </p:spPr>
+        <p:txBody>
+          <a:bodyPr/>
+          <a:lstStyle/>
+          <a:p>
+            <a:r>
+              <a:rPr lang="en-US" dirty="0">
+                <a:latin typeface="Times New Roman" panose="02020603050405020304" pitchFamily="18" charset="0"/>
+                <a:cs typeface="Times New Roman" panose="02020603050405020304" pitchFamily="18" charset="0"/>
+              </a:rPr>
+              <a:t>conclusion</a:t>
+            </a:r>
+          </a:p>
+        </p:txBody>
+      </p:sp>
+      <p:sp>
+        <p:nvSpPr>
+          <p:cNvPr id="3" name="Content Placeholder 2">
+            <a:extLst>
+              <a:ext uri="{FF2B5EF4-FFF2-40B4-BE49-F238E27FC236}">
+                <a16:creationId xmlns:a16="http://schemas.microsoft.com/office/drawing/2014/main" id="{BA591932-6B37-1614-D1AB-74C98627B73C}"/>
+              </a:ext>
+            </a:extLst>
+          </p:cNvPr>
+          <p:cNvSpPr>
+            <a:spLocks noGrp="1"/>
+          </p:cNvSpPr>
+          <p:nvPr>
+            <p:ph idx="1"/>
+          </p:nvPr>
+        </p:nvSpPr>
+        <p:spPr>
+          <a:xfrm>
+            <a:off x="685800" y="1796144"/>
+            <a:ext cx="10820400" cy="4422542"/>
+          </a:xfrm>
+        </p:spPr>
+        <p:txBody>
+          <a:bodyPr/>
+          <a:lstStyle/>
+          <a:p>
+            <a:r>
+              <a:rPr lang="en-US" dirty="0">
+                <a:latin typeface="Times New Roman" panose="02020603050405020304" pitchFamily="18" charset="0"/>
+                <a:cs typeface="Times New Roman" panose="02020603050405020304" pitchFamily="18" charset="0"/>
+              </a:rPr>
+              <a:t>App functionality</a:t>
+            </a:r>
+          </a:p>
+          <a:p>
+            <a:pPr lvl="1"/>
+            <a:r>
+              <a:rPr lang="en-US" dirty="0">
+                <a:latin typeface="Times New Roman" panose="02020603050405020304" pitchFamily="18" charset="0"/>
+                <a:cs typeface="Times New Roman" panose="02020603050405020304" pitchFamily="18" charset="0"/>
+              </a:rPr>
+              <a:t>Generated schedule based on owner input</a:t>
+            </a:r>
+          </a:p>
+          <a:p>
+            <a:pPr marL="457200" lvl="1" indent="0">
+              <a:buNone/>
+            </a:pPr>
+            <a:endParaRPr lang="en-US" dirty="0">
+              <a:latin typeface="Times New Roman" panose="02020603050405020304" pitchFamily="18" charset="0"/>
+              <a:cs typeface="Times New Roman" panose="02020603050405020304" pitchFamily="18" charset="0"/>
+            </a:endParaRPr>
+          </a:p>
+          <a:p>
+            <a:pPr lvl="1"/>
+            <a:r>
+              <a:rPr lang="en-US" dirty="0">
+                <a:latin typeface="Times New Roman" panose="02020603050405020304" pitchFamily="18" charset="0"/>
+                <a:cs typeface="Times New Roman" panose="02020603050405020304" pitchFamily="18" charset="0"/>
+              </a:rPr>
+              <a:t>Allotted time can be changed to fit owner schedule</a:t>
+            </a:r>
+          </a:p>
+          <a:p>
+            <a:pPr marL="457200" lvl="1" indent="0">
+              <a:buNone/>
+            </a:pPr>
+            <a:endParaRPr lang="en-US" dirty="0">
+              <a:latin typeface="Times New Roman" panose="02020603050405020304" pitchFamily="18" charset="0"/>
+              <a:cs typeface="Times New Roman" panose="02020603050405020304" pitchFamily="18" charset="0"/>
+            </a:endParaRPr>
+          </a:p>
+          <a:p>
+            <a:pPr lvl="1"/>
+            <a:r>
+              <a:rPr lang="en-US" dirty="0">
+                <a:latin typeface="Times New Roman" panose="02020603050405020304" pitchFamily="18" charset="0"/>
+                <a:cs typeface="Times New Roman" panose="02020603050405020304" pitchFamily="18" charset="0"/>
+              </a:rPr>
+              <a:t>Mimics suggestions based on season</a:t>
+            </a:r>
+          </a:p>
+          <a:p>
+            <a:pPr marL="457200" lvl="1" indent="0">
+              <a:buNone/>
+            </a:pPr>
+            <a:endParaRPr lang="en-US" dirty="0">
+              <a:latin typeface="Times New Roman" panose="02020603050405020304" pitchFamily="18" charset="0"/>
+              <a:cs typeface="Times New Roman" panose="02020603050405020304" pitchFamily="18" charset="0"/>
+            </a:endParaRPr>
+          </a:p>
+          <a:p>
+            <a:pPr lvl="1"/>
+            <a:r>
+              <a:rPr lang="en-US" dirty="0">
+                <a:latin typeface="Times New Roman" panose="02020603050405020304" pitchFamily="18" charset="0"/>
+                <a:cs typeface="Times New Roman" panose="02020603050405020304" pitchFamily="18" charset="0"/>
+              </a:rPr>
+              <a:t>Conflict detection</a:t>
+            </a:r>
+          </a:p>
+          <a:p>
+            <a:pPr marL="457200" lvl="1" indent="0">
+              <a:buNone/>
+            </a:pPr>
+            <a:endParaRPr lang="en-US" dirty="0">
+              <a:latin typeface="Times New Roman" panose="02020603050405020304" pitchFamily="18" charset="0"/>
+              <a:cs typeface="Times New Roman" panose="02020603050405020304" pitchFamily="18" charset="0"/>
+            </a:endParaRPr>
+          </a:p>
+          <a:p>
+            <a:pPr lvl="1"/>
+            <a:r>
+              <a:rPr lang="en-US" dirty="0">
+                <a:latin typeface="Times New Roman" panose="02020603050405020304" pitchFamily="18" charset="0"/>
+                <a:cs typeface="Times New Roman" panose="02020603050405020304" pitchFamily="18" charset="0"/>
+              </a:rPr>
+              <a:t>Breed identification</a:t>
+            </a:r>
+          </a:p>
+        </p:txBody>
+      </p:sp>
+    </p:spTree>
+    <p:extLst>
+      <p:ext uri="{BB962C8B-B14F-4D97-AF65-F5344CB8AC3E}">
+        <p14:creationId xmlns:p14="http://schemas.microsoft.com/office/powerpoint/2010/main" val="3175126269"/>
+      </p:ext>
+    </p:extLst>
+  </p:cSld>
+  <p:clrMapOvr>
+    <a:masterClrMapping/>
+  </p:clrMapOvr>
+</p:sld>
+</file>
+
+<file path=ppt/slides/slide16.xml><?xml version="1.0" encoding="utf-8"?>
+<p:sld xmlns:a="http://schemas.openxmlformats.org/drawingml/2006/main" xmlns:r="http://schemas.openxmlformats.org/officeDocument/2006/relationships" xmlns:p="http://schemas.openxmlformats.org/presentationml/2006/main">
+  <p:cSld>
+    <p:bg>
+      <p:bgPr>
+        <a:pattFill prst="pct10">
+          <a:fgClr>
+            <a:schemeClr val="accent1"/>
+          </a:fgClr>
+          <a:bgClr>
+            <a:schemeClr val="bg1"/>
+          </a:bgClr>
+        </a:pattFill>
+        <a:effectLst/>
+      </p:bgPr>
+    </p:bg>
+    <p:spTree>
+      <p:nvGrpSpPr>
+        <p:cNvPr id="1" name=""/>
+        <p:cNvGrpSpPr/>
+        <p:nvPr/>
+      </p:nvGrpSpPr>
+      <p:grpSpPr>
+        <a:xfrm>
+          <a:off x="0" y="0"/>
+          <a:ext cx="0" cy="0"/>
+          <a:chOff x="0" y="0"/>
+          <a:chExt cx="0" cy="0"/>
+        </a:xfrm>
+      </p:grpSpPr>
+      <p:sp>
+        <p:nvSpPr>
+          <p:cNvPr id="4" name="Title 3">
+            <a:extLst>
+              <a:ext uri="{FF2B5EF4-FFF2-40B4-BE49-F238E27FC236}">
+                <a16:creationId xmlns:a16="http://schemas.microsoft.com/office/drawing/2014/main" id="{E7D1C799-FC48-D10C-79A7-4FDB0C1DE01C}"/>
+              </a:ext>
+            </a:extLst>
+          </p:cNvPr>
+          <p:cNvSpPr>
+            <a:spLocks noGrp="1"/>
+          </p:cNvSpPr>
+          <p:nvPr>
+            <p:ph type="title"/>
+          </p:nvPr>
+        </p:nvSpPr>
+        <p:spPr>
+          <a:xfrm>
+            <a:off x="1583871" y="2516973"/>
+            <a:ext cx="8610600" cy="1293028"/>
+          </a:xfrm>
+        </p:spPr>
+        <p:txBody>
+          <a:bodyPr/>
+          <a:lstStyle/>
+          <a:p>
+            <a:r>
+              <a:rPr lang="en-US" dirty="0">
+                <a:latin typeface="Times New Roman" panose="02020603050405020304" pitchFamily="18" charset="0"/>
+                <a:cs typeface="Times New Roman" panose="02020603050405020304" pitchFamily="18" charset="0"/>
+              </a:rPr>
+              <a:t>Thank you!!!!!!</a:t>
+            </a:r>
+          </a:p>
+        </p:txBody>
+      </p:sp>
+    </p:spTree>
+    <p:extLst>
+      <p:ext uri="{BB962C8B-B14F-4D97-AF65-F5344CB8AC3E}">
+        <p14:creationId xmlns:p14="http://schemas.microsoft.com/office/powerpoint/2010/main" val="1634350376"/>
+      </p:ext>
+    </p:extLst>
+  </p:cSld>
+  <p:clrMapOvr>
+    <a:masterClrMapping/>
+  </p:clrMapOvr>
+</p:sld>
+</file>
+
 <file path=ppt/slides/slide2.xml><?xml version="1.0" encoding="utf-8"?>
 <p:sld xmlns:a="http://schemas.openxmlformats.org/drawingml/2006/main" xmlns:r="http://schemas.openxmlformats.org/officeDocument/2006/relationships" xmlns:p="http://schemas.openxmlformats.org/presentationml/2006/main">
   <p:cSld>
@@ -7315,8 +8468,38 @@
         </p:blipFill>
         <p:spPr>
           <a:xfrm>
-            <a:off x="866664" y="2239539"/>
-            <a:ext cx="4415106" cy="3807475"/>
+            <a:off x="866664" y="2441469"/>
+            <a:ext cx="4309493" cy="3716397"/>
+          </a:xfrm>
+          <a:prstGeom prst="rect">
+            <a:avLst/>
+          </a:prstGeom>
+        </p:spPr>
+      </p:pic>
+      <p:pic>
+        <p:nvPicPr>
+          <p:cNvPr id="7" name="Picture 6">
+            <a:extLst>
+              <a:ext uri="{FF2B5EF4-FFF2-40B4-BE49-F238E27FC236}">
+                <a16:creationId xmlns:a16="http://schemas.microsoft.com/office/drawing/2014/main" id="{12721AD7-F2A8-C718-7F40-4D13D9DAFBC2}"/>
+              </a:ext>
+            </a:extLst>
+          </p:cNvPr>
+          <p:cNvPicPr>
+            <a:picLocks noChangeAspect="1"/>
+          </p:cNvPicPr>
+          <p:nvPr/>
+        </p:nvPicPr>
+        <p:blipFill>
+          <a:blip r:embed="rId3"/>
+          <a:stretch>
+            <a:fillRect/>
+          </a:stretch>
+        </p:blipFill>
+        <p:spPr>
+          <a:xfrm>
+            <a:off x="6841672" y="2350025"/>
+            <a:ext cx="4093490" cy="3807841"/>
           </a:xfrm>
           <a:prstGeom prst="rect">
             <a:avLst/>
@@ -7369,44 +8552,251 @@
             <p:ph type="title"/>
           </p:nvPr>
         </p:nvSpPr>
-        <p:spPr/>
+        <p:spPr>
+          <a:xfrm>
+            <a:off x="2895600" y="764373"/>
+            <a:ext cx="8610600" cy="830384"/>
+          </a:xfrm>
+        </p:spPr>
         <p:txBody>
           <a:bodyPr/>
           <a:lstStyle/>
           <a:p>
-            <a:endParaRPr lang="en-US"/>
-          </a:p>
-        </p:txBody>
-      </p:sp>
-      <p:sp>
-        <p:nvSpPr>
-          <p:cNvPr id="3" name="Content Placeholder 2">
+            <a:r>
+              <a:rPr lang="en-US" dirty="0">
+                <a:latin typeface="Times New Roman" panose="02020603050405020304" pitchFamily="18" charset="0"/>
+                <a:cs typeface="Times New Roman" panose="02020603050405020304" pitchFamily="18" charset="0"/>
+              </a:rPr>
+              <a:t>Demo (contd.)</a:t>
+            </a:r>
+            <a:endParaRPr lang="en-US" dirty="0"/>
+          </a:p>
+        </p:txBody>
+      </p:sp>
+      <p:pic>
+        <p:nvPicPr>
+          <p:cNvPr id="5" name="Content Placeholder 4">
             <a:extLst>
               <a:ext uri="{FF2B5EF4-FFF2-40B4-BE49-F238E27FC236}">
-                <a16:creationId xmlns:a16="http://schemas.microsoft.com/office/drawing/2014/main" id="{110C5250-79D4-F403-952A-6EF415897F13}"/>
+                <a16:creationId xmlns:a16="http://schemas.microsoft.com/office/drawing/2014/main" id="{DDB79E0C-D019-DF98-CC97-44CB2394D17E}"/>
               </a:ext>
             </a:extLst>
           </p:cNvPr>
-          <p:cNvSpPr>
-            <a:spLocks noGrp="1"/>
-          </p:cNvSpPr>
+          <p:cNvPicPr>
+            <a:picLocks noGrp="1" noChangeAspect="1"/>
+          </p:cNvPicPr>
           <p:nvPr>
             <p:ph idx="1"/>
           </p:nvPr>
-        </p:nvSpPr>
-        <p:spPr/>
-        <p:txBody>
-          <a:bodyPr/>
-          <a:lstStyle/>
-          <a:p>
-            <a:endParaRPr lang="en-US"/>
-          </a:p>
-        </p:txBody>
-      </p:sp>
+        </p:nvPicPr>
+        <p:blipFill>
+          <a:blip r:embed="rId2"/>
+          <a:stretch>
+            <a:fillRect/>
+          </a:stretch>
+        </p:blipFill>
+        <p:spPr>
+          <a:xfrm>
+            <a:off x="591896" y="1736271"/>
+            <a:ext cx="4913553" cy="4616600"/>
+          </a:xfrm>
+          <a:prstGeom prst="rect">
+            <a:avLst/>
+          </a:prstGeom>
+        </p:spPr>
+      </p:pic>
+      <p:pic>
+        <p:nvPicPr>
+          <p:cNvPr id="7" name="Picture 6">
+            <a:extLst>
+              <a:ext uri="{FF2B5EF4-FFF2-40B4-BE49-F238E27FC236}">
+                <a16:creationId xmlns:a16="http://schemas.microsoft.com/office/drawing/2014/main" id="{B5E7CB0A-560E-5597-9F72-72213D5D4DBF}"/>
+              </a:ext>
+            </a:extLst>
+          </p:cNvPr>
+          <p:cNvPicPr>
+            <a:picLocks noChangeAspect="1"/>
+          </p:cNvPicPr>
+          <p:nvPr/>
+        </p:nvPicPr>
+        <p:blipFill>
+          <a:blip r:embed="rId3"/>
+          <a:stretch>
+            <a:fillRect/>
+          </a:stretch>
+        </p:blipFill>
+        <p:spPr>
+          <a:xfrm>
+            <a:off x="5859970" y="1711160"/>
+            <a:ext cx="5360480" cy="4321340"/>
+          </a:xfrm>
+          <a:prstGeom prst="rect">
+            <a:avLst/>
+          </a:prstGeom>
+        </p:spPr>
+      </p:pic>
     </p:spTree>
     <p:extLst>
       <p:ext uri="{BB962C8B-B14F-4D97-AF65-F5344CB8AC3E}">
         <p14:creationId xmlns:p14="http://schemas.microsoft.com/office/powerpoint/2010/main" val="178239767"/>
+      </p:ext>
+    </p:extLst>
+  </p:cSld>
+  <p:clrMapOvr>
+    <a:masterClrMapping/>
+  </p:clrMapOvr>
+</p:sld>
+</file>
+
+<file path=ppt/slides/slide9.xml><?xml version="1.0" encoding="utf-8"?>
+<p:sld xmlns:a="http://schemas.openxmlformats.org/drawingml/2006/main" xmlns:r="http://schemas.openxmlformats.org/officeDocument/2006/relationships" xmlns:p="http://schemas.openxmlformats.org/presentationml/2006/main">
+  <p:cSld>
+    <p:spTree>
+      <p:nvGrpSpPr>
+        <p:cNvPr id="1" name=""/>
+        <p:cNvGrpSpPr/>
+        <p:nvPr/>
+      </p:nvGrpSpPr>
+      <p:grpSpPr>
+        <a:xfrm>
+          <a:off x="0" y="0"/>
+          <a:ext cx="0" cy="0"/>
+          <a:chOff x="0" y="0"/>
+          <a:chExt cx="0" cy="0"/>
+        </a:xfrm>
+      </p:grpSpPr>
+      <p:sp>
+        <p:nvSpPr>
+          <p:cNvPr id="2" name="Title 1">
+            <a:extLst>
+              <a:ext uri="{FF2B5EF4-FFF2-40B4-BE49-F238E27FC236}">
+                <a16:creationId xmlns:a16="http://schemas.microsoft.com/office/drawing/2014/main" id="{ED730A74-E585-DFF6-AEBD-4A29366E20F9}"/>
+              </a:ext>
+            </a:extLst>
+          </p:cNvPr>
+          <p:cNvSpPr>
+            <a:spLocks noGrp="1"/>
+          </p:cNvSpPr>
+          <p:nvPr>
+            <p:ph type="title"/>
+          </p:nvPr>
+        </p:nvSpPr>
+        <p:spPr>
+          <a:xfrm>
+            <a:off x="2895600" y="764373"/>
+            <a:ext cx="8610600" cy="922913"/>
+          </a:xfrm>
+        </p:spPr>
+        <p:txBody>
+          <a:bodyPr/>
+          <a:lstStyle/>
+          <a:p>
+            <a:r>
+              <a:rPr lang="en-US" dirty="0">
+                <a:latin typeface="Times New Roman" panose="02020603050405020304" pitchFamily="18" charset="0"/>
+                <a:cs typeface="Times New Roman" panose="02020603050405020304" pitchFamily="18" charset="0"/>
+              </a:rPr>
+              <a:t>Demo (contd.)</a:t>
+            </a:r>
+          </a:p>
+        </p:txBody>
+      </p:sp>
+      <p:pic>
+        <p:nvPicPr>
+          <p:cNvPr id="5" name="Content Placeholder 4">
+            <a:extLst>
+              <a:ext uri="{FF2B5EF4-FFF2-40B4-BE49-F238E27FC236}">
+                <a16:creationId xmlns:a16="http://schemas.microsoft.com/office/drawing/2014/main" id="{B3ADC3EA-E13E-9F77-5958-FA958789CEAE}"/>
+              </a:ext>
+            </a:extLst>
+          </p:cNvPr>
+          <p:cNvPicPr>
+            <a:picLocks noGrp="1" noChangeAspect="1"/>
+          </p:cNvPicPr>
+          <p:nvPr>
+            <p:ph idx="1"/>
+          </p:nvPr>
+        </p:nvPicPr>
+        <p:blipFill>
+          <a:blip r:embed="rId2"/>
+          <a:stretch>
+            <a:fillRect/>
+          </a:stretch>
+        </p:blipFill>
+        <p:spPr>
+          <a:xfrm>
+            <a:off x="371651" y="2150383"/>
+            <a:ext cx="4486907" cy="3772314"/>
+          </a:xfrm>
+          <a:prstGeom prst="rect">
+            <a:avLst/>
+          </a:prstGeom>
+        </p:spPr>
+      </p:pic>
+      <p:pic>
+        <p:nvPicPr>
+          <p:cNvPr id="7" name="Picture 6">
+            <a:extLst>
+              <a:ext uri="{FF2B5EF4-FFF2-40B4-BE49-F238E27FC236}">
+                <a16:creationId xmlns:a16="http://schemas.microsoft.com/office/drawing/2014/main" id="{286B1F83-AF78-1765-EDEF-8DED291ABCA9}"/>
+              </a:ext>
+            </a:extLst>
+          </p:cNvPr>
+          <p:cNvPicPr>
+            <a:picLocks noChangeAspect="1"/>
+          </p:cNvPicPr>
+          <p:nvPr/>
+        </p:nvPicPr>
+        <p:blipFill>
+          <a:blip r:embed="rId3"/>
+          <a:stretch>
+            <a:fillRect/>
+          </a:stretch>
+        </p:blipFill>
+        <p:spPr>
+          <a:xfrm>
+            <a:off x="4773531" y="2198914"/>
+            <a:ext cx="4344367" cy="3815443"/>
+          </a:xfrm>
+          <a:prstGeom prst="rect">
+            <a:avLst/>
+          </a:prstGeom>
+        </p:spPr>
+      </p:pic>
+      <p:pic>
+        <p:nvPicPr>
+          <p:cNvPr id="9" name="Picture 8">
+            <a:extLst>
+              <a:ext uri="{FF2B5EF4-FFF2-40B4-BE49-F238E27FC236}">
+                <a16:creationId xmlns:a16="http://schemas.microsoft.com/office/drawing/2014/main" id="{636A0D41-24EB-170E-05F7-02F844728A9C}"/>
+              </a:ext>
+            </a:extLst>
+          </p:cNvPr>
+          <p:cNvPicPr>
+            <a:picLocks noChangeAspect="1"/>
+          </p:cNvPicPr>
+          <p:nvPr/>
+        </p:nvPicPr>
+        <p:blipFill>
+          <a:blip r:embed="rId4"/>
+          <a:stretch>
+            <a:fillRect/>
+          </a:stretch>
+        </p:blipFill>
+        <p:spPr>
+          <a:xfrm>
+            <a:off x="8582434" y="2276421"/>
+            <a:ext cx="2898002" cy="747269"/>
+          </a:xfrm>
+          <a:prstGeom prst="rect">
+            <a:avLst/>
+          </a:prstGeom>
+        </p:spPr>
+      </p:pic>
+    </p:spTree>
+    <p:extLst>
+      <p:ext uri="{BB962C8B-B14F-4D97-AF65-F5344CB8AC3E}">
+        <p14:creationId xmlns:p14="http://schemas.microsoft.com/office/powerpoint/2010/main" val="3956909102"/>
       </p:ext>
     </p:extLst>
   </p:cSld>
